--- a/benchmark_presentation.pptx
+++ b/benchmark_presentation.pptx
@@ -15,6 +15,7 @@
     <p:sldId id="263" r:id="rId14"/>
     <p:sldId id="264" r:id="rId15"/>
     <p:sldId id="265" r:id="rId16"/>
+    <p:sldId id="266" r:id="rId17"/>
   </p:sldIdLst>
   <p:sldSz cx="9144000" cy="6858000" type="screen4x3"/>
   <p:notesSz cx="6858000" cy="9144000"/>
@@ -3097,9 +3098,30 @@
         <p:nvPr/>
       </p:nvGrpSpPr>
       <p:grpSpPr/>
+      <p:sp>
+        <p:nvSpPr>
+          <p:cNvPr id="2" name="Title 1"/>
+          <p:cNvSpPr>
+            <a:spLocks noGrp="1"/>
+          </p:cNvSpPr>
+          <p:nvPr>
+            <p:ph type="title"/>
+          </p:nvPr>
+        </p:nvSpPr>
+        <p:spPr/>
+        <p:txBody>
+          <a:bodyPr/>
+          <a:lstStyle/>
+          <a:p>
+            <a:r>
+              <a:t>FastMDAnalysis Runtime Scaling</a:t>
+            </a:r>
+          </a:p>
+        </p:txBody>
+      </p:sp>
       <p:pic>
         <p:nvPicPr>
-          <p:cNvPr id="2" name="Picture 1" descr="combined_runtime_scaling_log.png"/>
+          <p:cNvPr id="3" name="Picture 2" descr="fastmdanalysis_runtime_scaling.png"/>
           <p:cNvPicPr>
             <a:picLocks noChangeAspect="1"/>
           </p:cNvPicPr>
@@ -3113,52 +3135,14 @@
         </p:blipFill>
         <p:spPr>
           <a:xfrm>
-            <a:off x="548640" y="548640"/>
-            <a:ext cx="7863840" cy="5072333"/>
+            <a:off x="365760" y="1097280"/>
+            <a:ext cx="8412480" cy="5201474"/>
           </a:xfrm>
           <a:prstGeom prst="rect">
             <a:avLst/>
           </a:prstGeom>
         </p:spPr>
       </p:pic>
-      <p:sp>
-        <p:nvSpPr>
-          <p:cNvPr id="3" name="TextBox 2"/>
-          <p:cNvSpPr txBox="1"/>
-          <p:nvPr/>
-        </p:nvSpPr>
-        <p:spPr>
-          <a:xfrm>
-            <a:off x="548640" y="5852160"/>
-            <a:ext cx="7863840" cy="1280160"/>
-          </a:xfrm>
-          <a:prstGeom prst="rect">
-            <a:avLst/>
-          </a:prstGeom>
-          <a:noFill/>
-        </p:spPr>
-        <p:txBody>
-          <a:bodyPr wrap="square">
-            <a:spAutoFit/>
-          </a:bodyPr>
-          <a:lstStyle/>
-          <a:p>
-            <a:r>
-              <a:rPr sz="2000" b="1"/>
-              <a:t>Benchmark Scaling — Runtime (Log)</a:t>
-            </a:r>
-          </a:p>
-          <a:p>
-            <a:r>
-              <a:rPr sz="1400">
-                <a:latin typeface="Consolas"/>
-              </a:rPr>
-              <a:t>python benchmark_scaling.py --frames 500 1000 2000 5000 --iterations 1
-python scripts/plot_scaling.py --mode both --combined-y-scale log linear</a:t>
-            </a:r>
-          </a:p>
-        </p:txBody>
-      </p:sp>
     </p:spTree>
   </p:cSld>
   <p:clrMapOvr>
@@ -3177,9 +3161,30 @@
         <p:nvPr/>
       </p:nvGrpSpPr>
       <p:grpSpPr/>
+      <p:sp>
+        <p:nvSpPr>
+          <p:cNvPr id="2" name="Title 1"/>
+          <p:cNvSpPr>
+            <a:spLocks noGrp="1"/>
+          </p:cNvSpPr>
+          <p:nvPr>
+            <p:ph type="title"/>
+          </p:nvPr>
+        </p:nvSpPr>
+        <p:spPr/>
+        <p:txBody>
+          <a:bodyPr/>
+          <a:lstStyle/>
+          <a:p>
+            <a:r>
+              <a:t>Combined Memory Scaling (Log)</a:t>
+            </a:r>
+          </a:p>
+        </p:txBody>
+      </p:sp>
       <p:pic>
         <p:nvPicPr>
-          <p:cNvPr id="2" name="Picture 1" descr="mdanalysis_memory_scaling.png"/>
+          <p:cNvPr id="3" name="Picture 2" descr="combined_memory_scaling_log.png"/>
           <p:cNvPicPr>
             <a:picLocks noChangeAspect="1"/>
           </p:cNvPicPr>
@@ -3193,52 +3198,77 @@
         </p:blipFill>
         <p:spPr>
           <a:xfrm>
-            <a:off x="548640" y="548640"/>
-            <a:ext cx="7863840" cy="4864299"/>
+            <a:off x="365760" y="1097280"/>
+            <a:ext cx="8412480" cy="5426217"/>
           </a:xfrm>
           <a:prstGeom prst="rect">
             <a:avLst/>
           </a:prstGeom>
         </p:spPr>
       </p:pic>
-      <p:sp>
-        <p:nvSpPr>
-          <p:cNvPr id="3" name="TextBox 2"/>
-          <p:cNvSpPr txBox="1"/>
+    </p:spTree>
+  </p:cSld>
+  <p:clrMapOvr>
+    <a:masterClrMapping/>
+  </p:clrMapOvr>
+</p:sld>
+</file>
+
+<file path=ppt/slides/slide11.xml><?xml version="1.0" encoding="utf-8"?>
+<p:sld xmlns:a="http://schemas.openxmlformats.org/drawingml/2006/main" xmlns:p="http://schemas.openxmlformats.org/presentationml/2006/main" xmlns:r="http://schemas.openxmlformats.org/officeDocument/2006/relationships">
+  <p:cSld>
+    <p:spTree>
+      <p:nvGrpSpPr>
+        <p:cNvPr id="1" name=""/>
+        <p:cNvGrpSpPr/>
+        <p:nvPr/>
+      </p:nvGrpSpPr>
+      <p:grpSpPr/>
+      <p:sp>
+        <p:nvSpPr>
+          <p:cNvPr id="2" name="Title 1"/>
+          <p:cNvSpPr>
+            <a:spLocks noGrp="1"/>
+          </p:cNvSpPr>
+          <p:nvPr>
+            <p:ph type="title"/>
+          </p:nvPr>
+        </p:nvSpPr>
+        <p:spPr/>
+        <p:txBody>
+          <a:bodyPr/>
+          <a:lstStyle/>
+          <a:p>
+            <a:r>
+              <a:t>Lines of Code Comparison</a:t>
+            </a:r>
+          </a:p>
+        </p:txBody>
+      </p:sp>
+      <p:pic>
+        <p:nvPicPr>
+          <p:cNvPr id="3" name="Picture 2" descr="loc_comparison.png"/>
+          <p:cNvPicPr>
+            <a:picLocks noChangeAspect="1"/>
+          </p:cNvPicPr>
           <p:nvPr/>
-        </p:nvSpPr>
+        </p:nvPicPr>
+        <p:blipFill>
+          <a:blip r:embed="rId2"/>
+          <a:stretch>
+            <a:fillRect/>
+          </a:stretch>
+        </p:blipFill>
         <p:spPr>
           <a:xfrm>
-            <a:off x="548640" y="5852160"/>
-            <a:ext cx="7863840" cy="1280160"/>
+            <a:off x="365760" y="1097280"/>
+            <a:ext cx="8412480" cy="6300486"/>
           </a:xfrm>
           <a:prstGeom prst="rect">
             <a:avLst/>
           </a:prstGeom>
-          <a:noFill/>
         </p:spPr>
-        <p:txBody>
-          <a:bodyPr wrap="square">
-            <a:spAutoFit/>
-          </a:bodyPr>
-          <a:lstStyle/>
-          <a:p>
-            <a:r>
-              <a:rPr sz="2000" b="1"/>
-              <a:t>MDAnalysis – Memory Scaling</a:t>
-            </a:r>
-          </a:p>
-          <a:p>
-            <a:r>
-              <a:rPr sz="1400">
-                <a:latin typeface="Consolas"/>
-              </a:rPr>
-              <a:t>python benchmark_scaling.py --frames 500 1000 2000 5000 --iterations 1
-python scripts/plot_scaling.py --mode both --combined-y-scale log linear</a:t>
-            </a:r>
-          </a:p>
-        </p:txBody>
-      </p:sp>
+      </p:pic>
     </p:spTree>
   </p:cSld>
   <p:clrMapOvr>
@@ -3257,9 +3287,30 @@
         <p:nvPr/>
       </p:nvGrpSpPr>
       <p:grpSpPr/>
+      <p:sp>
+        <p:nvSpPr>
+          <p:cNvPr id="2" name="Title 1"/>
+          <p:cNvSpPr>
+            <a:spLocks noGrp="1"/>
+          </p:cNvSpPr>
+          <p:nvPr>
+            <p:ph type="title"/>
+          </p:nvPr>
+        </p:nvSpPr>
+        <p:spPr/>
+        <p:txBody>
+          <a:bodyPr/>
+          <a:lstStyle/>
+          <a:p>
+            <a:r>
+              <a:t>FastMDAnalysis Memory Scaling</a:t>
+            </a:r>
+          </a:p>
+        </p:txBody>
+      </p:sp>
       <p:pic>
         <p:nvPicPr>
-          <p:cNvPr id="2" name="Picture 1" descr="combined_runtime_scaling_linear.png"/>
+          <p:cNvPr id="3" name="Picture 2" descr="fastmdanalysis_memory_scaling.png"/>
           <p:cNvPicPr>
             <a:picLocks noChangeAspect="1"/>
           </p:cNvPicPr>
@@ -3273,52 +3324,14 @@
         </p:blipFill>
         <p:spPr>
           <a:xfrm>
-            <a:off x="548640" y="548640"/>
-            <a:ext cx="7863840" cy="4917558"/>
+            <a:off x="365760" y="1097280"/>
+            <a:ext cx="8412480" cy="5203669"/>
           </a:xfrm>
           <a:prstGeom prst="rect">
             <a:avLst/>
           </a:prstGeom>
         </p:spPr>
       </p:pic>
-      <p:sp>
-        <p:nvSpPr>
-          <p:cNvPr id="3" name="TextBox 2"/>
-          <p:cNvSpPr txBox="1"/>
-          <p:nvPr/>
-        </p:nvSpPr>
-        <p:spPr>
-          <a:xfrm>
-            <a:off x="548640" y="5852160"/>
-            <a:ext cx="7863840" cy="1280160"/>
-          </a:xfrm>
-          <a:prstGeom prst="rect">
-            <a:avLst/>
-          </a:prstGeom>
-          <a:noFill/>
-        </p:spPr>
-        <p:txBody>
-          <a:bodyPr wrap="square">
-            <a:spAutoFit/>
-          </a:bodyPr>
-          <a:lstStyle/>
-          <a:p>
-            <a:r>
-              <a:rPr sz="2000" b="1"/>
-              <a:t>Benchmark Scaling — Runtime (Linear)</a:t>
-            </a:r>
-          </a:p>
-          <a:p>
-            <a:r>
-              <a:rPr sz="1400">
-                <a:latin typeface="Consolas"/>
-              </a:rPr>
-              <a:t>python benchmark_scaling.py --frames 500 1000 2000 5000 --iterations 1
-python scripts/plot_scaling.py --mode both --combined-y-scale log linear</a:t>
-            </a:r>
-          </a:p>
-        </p:txBody>
-      </p:sp>
     </p:spTree>
   </p:cSld>
   <p:clrMapOvr>
@@ -3337,9 +3350,30 @@
         <p:nvPr/>
       </p:nvGrpSpPr>
       <p:grpSpPr/>
+      <p:sp>
+        <p:nvSpPr>
+          <p:cNvPr id="2" name="Title 1"/>
+          <p:cNvSpPr>
+            <a:spLocks noGrp="1"/>
+          </p:cNvSpPr>
+          <p:nvPr>
+            <p:ph type="title"/>
+          </p:nvPr>
+        </p:nvSpPr>
+        <p:spPr/>
+        <p:txBody>
+          <a:bodyPr/>
+          <a:lstStyle/>
+          <a:p>
+            <a:r>
+              <a:t>MDTraj Runtime Scaling</a:t>
+            </a:r>
+          </a:p>
+        </p:txBody>
+      </p:sp>
       <p:pic>
         <p:nvPicPr>
-          <p:cNvPr id="2" name="Picture 1" descr="combined_memory_scaling_log.png"/>
+          <p:cNvPr id="3" name="Picture 2" descr="mdtraj_runtime_scaling.png"/>
           <p:cNvPicPr>
             <a:picLocks noChangeAspect="1"/>
           </p:cNvPicPr>
@@ -3353,52 +3387,14 @@
         </p:blipFill>
         <p:spPr>
           <a:xfrm>
-            <a:off x="548640" y="548640"/>
-            <a:ext cx="7863840" cy="5072333"/>
+            <a:off x="365760" y="1097280"/>
+            <a:ext cx="8412480" cy="5203669"/>
           </a:xfrm>
           <a:prstGeom prst="rect">
             <a:avLst/>
           </a:prstGeom>
         </p:spPr>
       </p:pic>
-      <p:sp>
-        <p:nvSpPr>
-          <p:cNvPr id="3" name="TextBox 2"/>
-          <p:cNvSpPr txBox="1"/>
-          <p:nvPr/>
-        </p:nvSpPr>
-        <p:spPr>
-          <a:xfrm>
-            <a:off x="548640" y="5852160"/>
-            <a:ext cx="7863840" cy="1280160"/>
-          </a:xfrm>
-          <a:prstGeom prst="rect">
-            <a:avLst/>
-          </a:prstGeom>
-          <a:noFill/>
-        </p:spPr>
-        <p:txBody>
-          <a:bodyPr wrap="square">
-            <a:spAutoFit/>
-          </a:bodyPr>
-          <a:lstStyle/>
-          <a:p>
-            <a:r>
-              <a:rPr sz="2000" b="1"/>
-              <a:t>Benchmark Scaling — Memory (Log)</a:t>
-            </a:r>
-          </a:p>
-          <a:p>
-            <a:r>
-              <a:rPr sz="1400">
-                <a:latin typeface="Consolas"/>
-              </a:rPr>
-              <a:t>python benchmark_scaling.py --frames 500 1000 2000 5000 --iterations 1
-python scripts/plot_scaling.py --mode both --combined-y-scale log linear</a:t>
-            </a:r>
-          </a:p>
-        </p:txBody>
-      </p:sp>
     </p:spTree>
   </p:cSld>
   <p:clrMapOvr>
@@ -3417,9 +3413,30 @@
         <p:nvPr/>
       </p:nvGrpSpPr>
       <p:grpSpPr/>
+      <p:sp>
+        <p:nvSpPr>
+          <p:cNvPr id="2" name="Title 1"/>
+          <p:cNvSpPr>
+            <a:spLocks noGrp="1"/>
+          </p:cNvSpPr>
+          <p:nvPr>
+            <p:ph type="title"/>
+          </p:nvPr>
+        </p:nvSpPr>
+        <p:spPr/>
+        <p:txBody>
+          <a:bodyPr/>
+          <a:lstStyle/>
+          <a:p>
+            <a:r>
+              <a:t>MDTraj Memory Scaling</a:t>
+            </a:r>
+          </a:p>
+        </p:txBody>
+      </p:sp>
       <p:pic>
         <p:nvPicPr>
-          <p:cNvPr id="2" name="Picture 1" descr="combined_memory_scaling_linear.png"/>
+          <p:cNvPr id="3" name="Picture 2" descr="mdtraj_memory_scaling.png"/>
           <p:cNvPicPr>
             <a:picLocks noChangeAspect="1"/>
           </p:cNvPicPr>
@@ -3433,52 +3450,14 @@
         </p:blipFill>
         <p:spPr>
           <a:xfrm>
-            <a:off x="548640" y="548640"/>
-            <a:ext cx="7863840" cy="4973264"/>
+            <a:off x="365760" y="1097280"/>
+            <a:ext cx="8412480" cy="5203669"/>
           </a:xfrm>
           <a:prstGeom prst="rect">
             <a:avLst/>
           </a:prstGeom>
         </p:spPr>
       </p:pic>
-      <p:sp>
-        <p:nvSpPr>
-          <p:cNvPr id="3" name="TextBox 2"/>
-          <p:cNvSpPr txBox="1"/>
-          <p:nvPr/>
-        </p:nvSpPr>
-        <p:spPr>
-          <a:xfrm>
-            <a:off x="548640" y="5852160"/>
-            <a:ext cx="7863840" cy="1280160"/>
-          </a:xfrm>
-          <a:prstGeom prst="rect">
-            <a:avLst/>
-          </a:prstGeom>
-          <a:noFill/>
-        </p:spPr>
-        <p:txBody>
-          <a:bodyPr wrap="square">
-            <a:spAutoFit/>
-          </a:bodyPr>
-          <a:lstStyle/>
-          <a:p>
-            <a:r>
-              <a:rPr sz="2000" b="1"/>
-              <a:t>Benchmark Scaling — Memory (Linear)</a:t>
-            </a:r>
-          </a:p>
-          <a:p>
-            <a:r>
-              <a:rPr sz="1400">
-                <a:latin typeface="Consolas"/>
-              </a:rPr>
-              <a:t>python benchmark_scaling.py --frames 500 1000 2000 5000 --iterations 1
-python scripts/plot_scaling.py --mode both --combined-y-scale log linear</a:t>
-            </a:r>
-          </a:p>
-        </p:txBody>
-      </p:sp>
     </p:spTree>
   </p:cSld>
   <p:clrMapOvr>
@@ -3497,9 +3476,30 @@
         <p:nvPr/>
       </p:nvGrpSpPr>
       <p:grpSpPr/>
+      <p:sp>
+        <p:nvSpPr>
+          <p:cNvPr id="2" name="Title 1"/>
+          <p:cNvSpPr>
+            <a:spLocks noGrp="1"/>
+          </p:cNvSpPr>
+          <p:nvPr>
+            <p:ph type="title"/>
+          </p:nvPr>
+        </p:nvSpPr>
+        <p:spPr/>
+        <p:txBody>
+          <a:bodyPr/>
+          <a:lstStyle/>
+          <a:p>
+            <a:r>
+              <a:t>MDAnalysis Runtime Scaling</a:t>
+            </a:r>
+          </a:p>
+        </p:txBody>
+      </p:sp>
       <p:pic>
         <p:nvPicPr>
-          <p:cNvPr id="2" name="Picture 1" descr="fastmdanalysis_runtime_scaling.png"/>
+          <p:cNvPr id="3" name="Picture 2" descr="mdanalysis_runtime_scaling.png"/>
           <p:cNvPicPr>
             <a:picLocks noChangeAspect="1"/>
           </p:cNvPicPr>
@@ -3513,52 +3513,14 @@
         </p:blipFill>
         <p:spPr>
           <a:xfrm>
-            <a:off x="548640" y="548640"/>
-            <a:ext cx="7863840" cy="4862248"/>
+            <a:off x="365760" y="1097280"/>
+            <a:ext cx="8412480" cy="5201474"/>
           </a:xfrm>
           <a:prstGeom prst="rect">
             <a:avLst/>
           </a:prstGeom>
         </p:spPr>
       </p:pic>
-      <p:sp>
-        <p:nvSpPr>
-          <p:cNvPr id="3" name="TextBox 2"/>
-          <p:cNvSpPr txBox="1"/>
-          <p:nvPr/>
-        </p:nvSpPr>
-        <p:spPr>
-          <a:xfrm>
-            <a:off x="548640" y="5852160"/>
-            <a:ext cx="7863840" cy="1280160"/>
-          </a:xfrm>
-          <a:prstGeom prst="rect">
-            <a:avLst/>
-          </a:prstGeom>
-          <a:noFill/>
-        </p:spPr>
-        <p:txBody>
-          <a:bodyPr wrap="square">
-            <a:spAutoFit/>
-          </a:bodyPr>
-          <a:lstStyle/>
-          <a:p>
-            <a:r>
-              <a:rPr sz="2000" b="1"/>
-              <a:t>FastMDAnalysis – Runtime Scaling</a:t>
-            </a:r>
-          </a:p>
-          <a:p>
-            <a:r>
-              <a:rPr sz="1400">
-                <a:latin typeface="Consolas"/>
-              </a:rPr>
-              <a:t>python benchmark_scaling.py --frames 500 1000 2000 5000 --iterations 1
-python scripts/plot_scaling.py --mode both --combined-y-scale log linear</a:t>
-            </a:r>
-          </a:p>
-        </p:txBody>
-      </p:sp>
     </p:spTree>
   </p:cSld>
   <p:clrMapOvr>
@@ -3577,9 +3539,30 @@
         <p:nvPr/>
       </p:nvGrpSpPr>
       <p:grpSpPr/>
+      <p:sp>
+        <p:nvSpPr>
+          <p:cNvPr id="2" name="Title 1"/>
+          <p:cNvSpPr>
+            <a:spLocks noGrp="1"/>
+          </p:cNvSpPr>
+          <p:nvPr>
+            <p:ph type="title"/>
+          </p:nvPr>
+        </p:nvSpPr>
+        <p:spPr/>
+        <p:txBody>
+          <a:bodyPr/>
+          <a:lstStyle/>
+          <a:p>
+            <a:r>
+              <a:t>MDAnalysis Memory Scaling</a:t>
+            </a:r>
+          </a:p>
+        </p:txBody>
+      </p:sp>
       <p:pic>
         <p:nvPicPr>
-          <p:cNvPr id="2" name="Picture 1" descr="fastmdanalysis_memory_scaling.png"/>
+          <p:cNvPr id="3" name="Picture 2" descr="mdanalysis_memory_scaling.png"/>
           <p:cNvPicPr>
             <a:picLocks noChangeAspect="1"/>
           </p:cNvPicPr>
@@ -3593,52 +3576,14 @@
         </p:blipFill>
         <p:spPr>
           <a:xfrm>
-            <a:off x="548640" y="548640"/>
-            <a:ext cx="7863840" cy="4864299"/>
+            <a:off x="365760" y="1097280"/>
+            <a:ext cx="8412480" cy="5203669"/>
           </a:xfrm>
           <a:prstGeom prst="rect">
             <a:avLst/>
           </a:prstGeom>
         </p:spPr>
       </p:pic>
-      <p:sp>
-        <p:nvSpPr>
-          <p:cNvPr id="3" name="TextBox 2"/>
-          <p:cNvSpPr txBox="1"/>
-          <p:nvPr/>
-        </p:nvSpPr>
-        <p:spPr>
-          <a:xfrm>
-            <a:off x="548640" y="5852160"/>
-            <a:ext cx="7863840" cy="1280160"/>
-          </a:xfrm>
-          <a:prstGeom prst="rect">
-            <a:avLst/>
-          </a:prstGeom>
-          <a:noFill/>
-        </p:spPr>
-        <p:txBody>
-          <a:bodyPr wrap="square">
-            <a:spAutoFit/>
-          </a:bodyPr>
-          <a:lstStyle/>
-          <a:p>
-            <a:r>
-              <a:rPr sz="2000" b="1"/>
-              <a:t>FastMDAnalysis – Memory Scaling</a:t>
-            </a:r>
-          </a:p>
-          <a:p>
-            <a:r>
-              <a:rPr sz="1400">
-                <a:latin typeface="Consolas"/>
-              </a:rPr>
-              <a:t>python benchmark_scaling.py --frames 500 1000 2000 5000 --iterations 1
-python scripts/plot_scaling.py --mode both --combined-y-scale log linear</a:t>
-            </a:r>
-          </a:p>
-        </p:txBody>
-      </p:sp>
     </p:spTree>
   </p:cSld>
   <p:clrMapOvr>
@@ -3657,9 +3602,30 @@
         <p:nvPr/>
       </p:nvGrpSpPr>
       <p:grpSpPr/>
+      <p:sp>
+        <p:nvSpPr>
+          <p:cNvPr id="2" name="Title 1"/>
+          <p:cNvSpPr>
+            <a:spLocks noGrp="1"/>
+          </p:cNvSpPr>
+          <p:nvPr>
+            <p:ph type="title"/>
+          </p:nvPr>
+        </p:nvSpPr>
+        <p:spPr/>
+        <p:txBody>
+          <a:bodyPr/>
+          <a:lstStyle/>
+          <a:p>
+            <a:r>
+              <a:t>Combined Runtime Scaling (Linear)</a:t>
+            </a:r>
+          </a:p>
+        </p:txBody>
+      </p:sp>
       <p:pic>
         <p:nvPicPr>
-          <p:cNvPr id="2" name="Picture 1" descr="mdtraj_runtime_scaling.png"/>
+          <p:cNvPr id="3" name="Picture 2" descr="combined_runtime_scaling_linear.png"/>
           <p:cNvPicPr>
             <a:picLocks noChangeAspect="1"/>
           </p:cNvPicPr>
@@ -3673,52 +3639,14 @@
         </p:blipFill>
         <p:spPr>
           <a:xfrm>
-            <a:off x="548640" y="548640"/>
-            <a:ext cx="7863840" cy="4864299"/>
+            <a:off x="365760" y="1097280"/>
+            <a:ext cx="8412480" cy="5260643"/>
           </a:xfrm>
           <a:prstGeom prst="rect">
             <a:avLst/>
           </a:prstGeom>
         </p:spPr>
       </p:pic>
-      <p:sp>
-        <p:nvSpPr>
-          <p:cNvPr id="3" name="TextBox 2"/>
-          <p:cNvSpPr txBox="1"/>
-          <p:nvPr/>
-        </p:nvSpPr>
-        <p:spPr>
-          <a:xfrm>
-            <a:off x="548640" y="5852160"/>
-            <a:ext cx="7863840" cy="1280160"/>
-          </a:xfrm>
-          <a:prstGeom prst="rect">
-            <a:avLst/>
-          </a:prstGeom>
-          <a:noFill/>
-        </p:spPr>
-        <p:txBody>
-          <a:bodyPr wrap="square">
-            <a:spAutoFit/>
-          </a:bodyPr>
-          <a:lstStyle/>
-          <a:p>
-            <a:r>
-              <a:rPr sz="2000" b="1"/>
-              <a:t>MDTraj – Runtime Scaling</a:t>
-            </a:r>
-          </a:p>
-          <a:p>
-            <a:r>
-              <a:rPr sz="1400">
-                <a:latin typeface="Consolas"/>
-              </a:rPr>
-              <a:t>python benchmark_scaling.py --frames 500 1000 2000 5000 --iterations 1
-python scripts/plot_scaling.py --mode both --combined-y-scale log linear</a:t>
-            </a:r>
-          </a:p>
-        </p:txBody>
-      </p:sp>
     </p:spTree>
   </p:cSld>
   <p:clrMapOvr>
@@ -3737,9 +3665,30 @@
         <p:nvPr/>
       </p:nvGrpSpPr>
       <p:grpSpPr/>
+      <p:sp>
+        <p:nvSpPr>
+          <p:cNvPr id="2" name="Title 1"/>
+          <p:cNvSpPr>
+            <a:spLocks noGrp="1"/>
+          </p:cNvSpPr>
+          <p:nvPr>
+            <p:ph type="title"/>
+          </p:nvPr>
+        </p:nvSpPr>
+        <p:spPr/>
+        <p:txBody>
+          <a:bodyPr/>
+          <a:lstStyle/>
+          <a:p>
+            <a:r>
+              <a:t>Combined Runtime Scaling (Log)</a:t>
+            </a:r>
+          </a:p>
+        </p:txBody>
+      </p:sp>
       <p:pic>
         <p:nvPicPr>
-          <p:cNvPr id="2" name="Picture 1" descr="mdtraj_memory_scaling.png"/>
+          <p:cNvPr id="3" name="Picture 2" descr="combined_runtime_scaling_log.png"/>
           <p:cNvPicPr>
             <a:picLocks noChangeAspect="1"/>
           </p:cNvPicPr>
@@ -3753,52 +3702,14 @@
         </p:blipFill>
         <p:spPr>
           <a:xfrm>
-            <a:off x="548640" y="548640"/>
-            <a:ext cx="7863840" cy="4862248"/>
+            <a:off x="365760" y="1097280"/>
+            <a:ext cx="8412480" cy="5426217"/>
           </a:xfrm>
           <a:prstGeom prst="rect">
             <a:avLst/>
           </a:prstGeom>
         </p:spPr>
       </p:pic>
-      <p:sp>
-        <p:nvSpPr>
-          <p:cNvPr id="3" name="TextBox 2"/>
-          <p:cNvSpPr txBox="1"/>
-          <p:nvPr/>
-        </p:nvSpPr>
-        <p:spPr>
-          <a:xfrm>
-            <a:off x="548640" y="5852160"/>
-            <a:ext cx="7863840" cy="1280160"/>
-          </a:xfrm>
-          <a:prstGeom prst="rect">
-            <a:avLst/>
-          </a:prstGeom>
-          <a:noFill/>
-        </p:spPr>
-        <p:txBody>
-          <a:bodyPr wrap="square">
-            <a:spAutoFit/>
-          </a:bodyPr>
-          <a:lstStyle/>
-          <a:p>
-            <a:r>
-              <a:rPr sz="2000" b="1"/>
-              <a:t>MDTraj – Memory Scaling</a:t>
-            </a:r>
-          </a:p>
-          <a:p>
-            <a:r>
-              <a:rPr sz="1400">
-                <a:latin typeface="Consolas"/>
-              </a:rPr>
-              <a:t>python benchmark_scaling.py --frames 500 1000 2000 5000 --iterations 1
-python scripts/plot_scaling.py --mode both --combined-y-scale log linear</a:t>
-            </a:r>
-          </a:p>
-        </p:txBody>
-      </p:sp>
     </p:spTree>
   </p:cSld>
   <p:clrMapOvr>
@@ -3817,9 +3728,30 @@
         <p:nvPr/>
       </p:nvGrpSpPr>
       <p:grpSpPr/>
+      <p:sp>
+        <p:nvSpPr>
+          <p:cNvPr id="2" name="Title 1"/>
+          <p:cNvSpPr>
+            <a:spLocks noGrp="1"/>
+          </p:cNvSpPr>
+          <p:nvPr>
+            <p:ph type="title"/>
+          </p:nvPr>
+        </p:nvSpPr>
+        <p:spPr/>
+        <p:txBody>
+          <a:bodyPr/>
+          <a:lstStyle/>
+          <a:p>
+            <a:r>
+              <a:t>Combined Memory Scaling (Linear)</a:t>
+            </a:r>
+          </a:p>
+        </p:txBody>
+      </p:sp>
       <p:pic>
         <p:nvPicPr>
-          <p:cNvPr id="2" name="Picture 1" descr="mdanalysis_runtime_scaling.png"/>
+          <p:cNvPr id="3" name="Picture 2" descr="combined_memory_scaling_linear.png"/>
           <p:cNvPicPr>
             <a:picLocks noChangeAspect="1"/>
           </p:cNvPicPr>
@@ -3833,52 +3765,14 @@
         </p:blipFill>
         <p:spPr>
           <a:xfrm>
-            <a:off x="548640" y="548640"/>
-            <a:ext cx="7863840" cy="4862248"/>
+            <a:off x="365760" y="1097280"/>
+            <a:ext cx="8412480" cy="5320236"/>
           </a:xfrm>
           <a:prstGeom prst="rect">
             <a:avLst/>
           </a:prstGeom>
         </p:spPr>
       </p:pic>
-      <p:sp>
-        <p:nvSpPr>
-          <p:cNvPr id="3" name="TextBox 2"/>
-          <p:cNvSpPr txBox="1"/>
-          <p:nvPr/>
-        </p:nvSpPr>
-        <p:spPr>
-          <a:xfrm>
-            <a:off x="548640" y="5852160"/>
-            <a:ext cx="7863840" cy="1280160"/>
-          </a:xfrm>
-          <a:prstGeom prst="rect">
-            <a:avLst/>
-          </a:prstGeom>
-          <a:noFill/>
-        </p:spPr>
-        <p:txBody>
-          <a:bodyPr wrap="square">
-            <a:spAutoFit/>
-          </a:bodyPr>
-          <a:lstStyle/>
-          <a:p>
-            <a:r>
-              <a:rPr sz="2000" b="1"/>
-              <a:t>MDAnalysis – Runtime Scaling</a:t>
-            </a:r>
-          </a:p>
-          <a:p>
-            <a:r>
-              <a:rPr sz="1400">
-                <a:latin typeface="Consolas"/>
-              </a:rPr>
-              <a:t>python benchmark_scaling.py --frames 500 1000 2000 5000 --iterations 1
-python scripts/plot_scaling.py --mode both --combined-y-scale log linear</a:t>
-            </a:r>
-          </a:p>
-        </p:txBody>
-      </p:sp>
     </p:spTree>
   </p:cSld>
   <p:clrMapOvr>
